--- a/presentation/Car_Market_Trends_Analysis.pptx
+++ b/presentation/Car_Market_Trends_Analysis.pptx
@@ -11242,7 +11242,7 @@
         <p:spPr>
           <a:xfrm>
             <a:off x="422959" y="5737443"/>
-            <a:ext cx="2981643" cy="830997"/>
+            <a:ext cx="7510550" cy="830997"/>
           </a:xfrm>
           <a:prstGeom prst="rect">
             <a:avLst/>
@@ -11326,29 +11326,13 @@
           </a:lstStyle>
           <a:p>
             <a:r>
-              <a:rPr lang="en-GB" dirty="0"/>
-              <a:t> </a:t>
+              <a:rPr lang="en-IN" sz="1800" b="0" u="sng" dirty="0">
+                <a:solidFill>
+                  <a:srgbClr val="0070C0"/>
+                </a:solidFill>
+              </a:rPr>
+              <a:t>https://github.com/Mubasheermohd18/car-market-trends-analysis</a:t>
             </a:r>
-            <a:r>
-              <a:rPr lang="en-GB" sz="2000" b="0" u="sng" dirty="0">
-                <a:solidFill>
-                  <a:srgbClr val="0070C0"/>
-                </a:solidFill>
-                <a:hlinkClick r:id="rId3" action="ppaction://hlinkfile">
-                  <a:extLst>
-                    <a:ext uri="{A12FA001-AC4F-418D-AE19-62706E023703}">
-                      <ahyp:hlinkClr xmlns:ahyp="http://schemas.microsoft.com/office/drawing/2018/hyperlinkcolor" val="tx"/>
-                    </a:ext>
-                  </a:extLst>
-                </a:hlinkClick>
-              </a:rPr>
-              <a:t>Demo Link</a:t>
-            </a:r>
-            <a:endParaRPr lang="en-IN" b="0" u="sng" dirty="0">
-              <a:solidFill>
-                <a:srgbClr val="0070C0"/>
-              </a:solidFill>
-            </a:endParaRPr>
           </a:p>
         </p:txBody>
       </p:sp>
@@ -11400,7 +11384,7 @@
           <p:nvPr/>
         </p:nvPicPr>
         <p:blipFill>
-          <a:blip r:embed="rId4"/>
+          <a:blip r:embed="rId3"/>
           <a:stretch>
             <a:fillRect/>
           </a:stretch>
@@ -11430,7 +11414,7 @@
           <p:nvPr/>
         </p:nvPicPr>
         <p:blipFill>
-          <a:blip r:embed="rId5"/>
+          <a:blip r:embed="rId4"/>
           <a:stretch>
             <a:fillRect/>
           </a:stretch>
@@ -18092,8 +18076,8 @@
         </p:nvSpPr>
         <p:spPr>
           <a:xfrm>
-            <a:off x="422959" y="5737443"/>
-            <a:ext cx="2981643" cy="830997"/>
+            <a:off x="414250" y="6056421"/>
+            <a:ext cx="8895212" cy="830997"/>
           </a:xfrm>
           <a:prstGeom prst="rect">
             <a:avLst/>
@@ -18177,25 +18161,15 @@
           </a:lstStyle>
           <a:p>
             <a:r>
-              <a:rPr lang="en-GB" dirty="0"/>
-              <a:t> </a:t>
+              <a:rPr lang="en-GB" sz="2000" dirty="0">
+                <a:hlinkClick r:id="rId3"/>
+              </a:rPr>
+              <a:t>https://github.com/Mubasheermohd18/car-market-trends-analysis</a:t>
             </a:r>
-            <a:r>
-              <a:rPr lang="en-GB" sz="2000" b="0" u="sng" dirty="0">
-                <a:solidFill>
-                  <a:srgbClr val="0070C0"/>
-                </a:solidFill>
-                <a:hlinkClick r:id="rId3" action="ppaction://hlinkfile">
-                  <a:extLst>
-                    <a:ext uri="{A12FA001-AC4F-418D-AE19-62706E023703}">
-                      <ahyp:hlinkClr xmlns:ahyp="http://schemas.microsoft.com/office/drawing/2018/hyperlinkcolor" val="tx"/>
-                    </a:ext>
-                  </a:extLst>
-                </a:hlinkClick>
-              </a:rPr>
-              <a:t>Demo Link</a:t>
-            </a:r>
-            <a:endParaRPr lang="en-IN" b="0" u="sng" dirty="0">
+            <a:endParaRPr lang="en-GB" sz="2000" dirty="0"/>
+          </a:p>
+          <a:p>
+            <a:endParaRPr lang="en-IN" sz="2000" b="0" u="sng" dirty="0">
               <a:solidFill>
                 <a:srgbClr val="0070C0"/>
               </a:solidFill>
@@ -18661,7 +18635,7 @@
         </p:nvSpPr>
         <p:spPr>
           <a:xfrm>
-            <a:off x="675957" y="493049"/>
+            <a:off x="675957" y="-49285"/>
             <a:ext cx="9182146" cy="830997"/>
           </a:xfrm>
         </p:spPr>
@@ -19215,8 +19189,8 @@
         </p:nvSpPr>
         <p:spPr>
           <a:xfrm>
-            <a:off x="422959" y="5737443"/>
-            <a:ext cx="2981643" cy="830997"/>
+            <a:off x="525406" y="6106597"/>
+            <a:ext cx="9045313" cy="830997"/>
           </a:xfrm>
           <a:prstGeom prst="rect">
             <a:avLst/>
@@ -19300,23 +19274,12 @@
           </a:lstStyle>
           <a:p>
             <a:r>
-              <a:rPr lang="en-GB" dirty="0"/>
-              <a:t> </a:t>
-            </a:r>
-            <a:r>
               <a:rPr lang="en-GB" sz="2000" b="0" u="sng" dirty="0">
                 <a:solidFill>
                   <a:srgbClr val="0070C0"/>
                 </a:solidFill>
-                <a:hlinkClick r:id="rId3" action="ppaction://hlinkfile">
-                  <a:extLst>
-                    <a:ext uri="{A12FA001-AC4F-418D-AE19-62706E023703}">
-                      <ahyp:hlinkClr xmlns:ahyp="http://schemas.microsoft.com/office/drawing/2018/hyperlinkcolor" val="tx"/>
-                    </a:ext>
-                  </a:extLst>
-                </a:hlinkClick>
               </a:rPr>
-              <a:t>Demo Link</a:t>
+              <a:t>https://github.com/Mubasheermohd18/car-market-trends-analysis</a:t>
             </a:r>
             <a:endParaRPr lang="en-IN" b="0" u="sng" dirty="0">
               <a:solidFill>
@@ -19374,14 +19337,14 @@
           <p:nvPr/>
         </p:nvPicPr>
         <p:blipFill>
-          <a:blip r:embed="rId4"/>
+          <a:blip r:embed="rId3"/>
           <a:stretch>
             <a:fillRect/>
           </a:stretch>
         </p:blipFill>
         <p:spPr>
           <a:xfrm>
-            <a:off x="675957" y="1275371"/>
+            <a:off x="675957" y="970571"/>
             <a:ext cx="9757362" cy="5089580"/>
           </a:xfrm>
           <a:prstGeom prst="rect">
@@ -20160,7 +20123,7 @@
         <p:spPr>
           <a:xfrm>
             <a:off x="422959" y="5737443"/>
-            <a:ext cx="2981643" cy="830997"/>
+            <a:ext cx="10375670" cy="830997"/>
           </a:xfrm>
           <a:prstGeom prst="rect">
             <a:avLst/>
@@ -20244,25 +20207,15 @@
           </a:lstStyle>
           <a:p>
             <a:r>
-              <a:rPr lang="en-GB" dirty="0"/>
-              <a:t> </a:t>
+              <a:rPr lang="en-GB" sz="1600" dirty="0">
+                <a:hlinkClick r:id="rId3"/>
+              </a:rPr>
+              <a:t>https://github.com/Mubasheermohd18/car-market-trends-analysis</a:t>
             </a:r>
-            <a:r>
-              <a:rPr lang="en-GB" sz="2000" b="0" u="sng" dirty="0">
-                <a:solidFill>
-                  <a:srgbClr val="0070C0"/>
-                </a:solidFill>
-                <a:hlinkClick r:id="rId3" action="ppaction://hlinkfile">
-                  <a:extLst>
-                    <a:ext uri="{A12FA001-AC4F-418D-AE19-62706E023703}">
-                      <ahyp:hlinkClr xmlns:ahyp="http://schemas.microsoft.com/office/drawing/2018/hyperlinkcolor" val="tx"/>
-                    </a:ext>
-                  </a:extLst>
-                </a:hlinkClick>
-              </a:rPr>
-              <a:t>Demo Link</a:t>
-            </a:r>
-            <a:endParaRPr lang="en-IN" b="0" u="sng" dirty="0">
+            <a:endParaRPr lang="en-GB" sz="1600" dirty="0"/>
+          </a:p>
+          <a:p>
+            <a:endParaRPr lang="en-IN" sz="1600" b="0" u="sng" dirty="0">
               <a:solidFill>
                 <a:srgbClr val="0070C0"/>
               </a:solidFill>
@@ -21335,7 +21288,7 @@
         <p:spPr>
           <a:xfrm>
             <a:off x="422959" y="5737443"/>
-            <a:ext cx="2981643" cy="830997"/>
+            <a:ext cx="7153498" cy="830997"/>
           </a:xfrm>
           <a:prstGeom prst="rect">
             <a:avLst/>
@@ -21419,29 +21372,13 @@
           </a:lstStyle>
           <a:p>
             <a:r>
-              <a:rPr lang="en-GB" dirty="0"/>
-              <a:t> </a:t>
+              <a:rPr lang="en-IN" sz="1800" b="0" u="sng" dirty="0">
+                <a:solidFill>
+                  <a:srgbClr val="0070C0"/>
+                </a:solidFill>
+              </a:rPr>
+              <a:t>https://github.com/Mubasheermohd18/car-market-trends-analysis</a:t>
             </a:r>
-            <a:r>
-              <a:rPr lang="en-GB" sz="2000" b="0" u="sng" dirty="0">
-                <a:solidFill>
-                  <a:srgbClr val="0070C0"/>
-                </a:solidFill>
-                <a:hlinkClick r:id="rId3" action="ppaction://hlinkfile">
-                  <a:extLst>
-                    <a:ext uri="{A12FA001-AC4F-418D-AE19-62706E023703}">
-                      <ahyp:hlinkClr xmlns:ahyp="http://schemas.microsoft.com/office/drawing/2018/hyperlinkcolor" val="tx"/>
-                    </a:ext>
-                  </a:extLst>
-                </a:hlinkClick>
-              </a:rPr>
-              <a:t>Demo Link</a:t>
-            </a:r>
-            <a:endParaRPr lang="en-IN" b="0" u="sng" dirty="0">
-              <a:solidFill>
-                <a:srgbClr val="0070C0"/>
-              </a:solidFill>
-            </a:endParaRPr>
           </a:p>
         </p:txBody>
       </p:sp>
@@ -21493,7 +21430,7 @@
           <p:nvPr/>
         </p:nvPicPr>
         <p:blipFill>
-          <a:blip r:embed="rId4"/>
+          <a:blip r:embed="rId3"/>
           <a:stretch>
             <a:fillRect/>
           </a:stretch>
@@ -21523,7 +21460,7 @@
           <p:nvPr/>
         </p:nvPicPr>
         <p:blipFill>
-          <a:blip r:embed="rId5"/>
+          <a:blip r:embed="rId4"/>
           <a:stretch>
             <a:fillRect/>
           </a:stretch>
@@ -22567,21 +22504,21 @@
 </file>
 
 <file path=customXml/item1.xml><?xml version="1.0" encoding="utf-8"?>
+<?mso-contentType ?>
+<FormTemplates xmlns="http://schemas.microsoft.com/sharepoint/v3/contenttype/forms">
+  <Display>DocumentLibraryForm</Display>
+  <Edit>DocumentLibraryForm</Edit>
+  <New>DocumentLibraryForm</New>
+</FormTemplates>
+</file>
+
+<file path=customXml/item2.xml><?xml version="1.0" encoding="utf-8"?>
 <p:properties xmlns:p="http://schemas.microsoft.com/office/2006/metadata/properties" xmlns:xsi="http://www.w3.org/2001/XMLSchema-instance" xmlns:pc="http://schemas.microsoft.com/office/infopath/2007/PartnerControls">
   <documentManagement>
     <Status xmlns="71af3243-3dd4-4a8d-8c0d-dd76da1f02a5">Not started</Status>
     <MediaServiceKeyPoints xmlns="71af3243-3dd4-4a8d-8c0d-dd76da1f02a5" xsi:nil="true"/>
   </documentManagement>
 </p:properties>
-</file>
-
-<file path=customXml/item2.xml><?xml version="1.0" encoding="utf-8"?>
-<?mso-contentType ?>
-<FormTemplates xmlns="http://schemas.microsoft.com/sharepoint/v3/contenttype/forms">
-  <Display>DocumentLibraryForm</Display>
-  <Edit>DocumentLibraryForm</Edit>
-  <New>DocumentLibraryForm</New>
-</FormTemplates>
 </file>
 
 <file path=customXml/item3.xml><?xml version="1.0" encoding="utf-8"?>
@@ -22806,19 +22743,19 @@
 </file>
 
 <file path=customXml/itemProps1.xml><?xml version="1.0" encoding="utf-8"?>
+<ds:datastoreItem xmlns:ds="http://schemas.openxmlformats.org/officeDocument/2006/customXml" ds:itemID="{05D99ABA-76CE-4A8E-B5F0-C051B96628DE}">
+  <ds:schemaRefs>
+    <ds:schemaRef ds:uri="http://schemas.microsoft.com/sharepoint/v3/contenttype/forms"/>
+  </ds:schemaRefs>
+</ds:datastoreItem>
+</file>
+
+<file path=customXml/itemProps2.xml><?xml version="1.0" encoding="utf-8"?>
 <ds:datastoreItem xmlns:ds="http://schemas.openxmlformats.org/officeDocument/2006/customXml" ds:itemID="{4DEA9014-ED64-4558-B1E1-D03F0EE32BEB}">
   <ds:schemaRefs>
     <ds:schemaRef ds:uri="http://schemas.microsoft.com/office/2006/metadata/properties"/>
     <ds:schemaRef ds:uri="http://schemas.microsoft.com/office/infopath/2007/PartnerControls"/>
     <ds:schemaRef ds:uri="71af3243-3dd4-4a8d-8c0d-dd76da1f02a5"/>
-  </ds:schemaRefs>
-</ds:datastoreItem>
-</file>
-
-<file path=customXml/itemProps2.xml><?xml version="1.0" encoding="utf-8"?>
-<ds:datastoreItem xmlns:ds="http://schemas.openxmlformats.org/officeDocument/2006/customXml" ds:itemID="{05D99ABA-76CE-4A8E-B5F0-C051B96628DE}">
-  <ds:schemaRefs>
-    <ds:schemaRef ds:uri="http://schemas.microsoft.com/sharepoint/v3/contenttype/forms"/>
   </ds:schemaRefs>
 </ds:datastoreItem>
 </file>
